--- a/plugins/office-cli/skills/house-style/templates/ana-blue/ana-blue.pptx
+++ b/plugins/office-cli/skills/house-style/templates/ana-blue/ana-blue.pptx
@@ -105,56 +105,6 @@
     </a:lvl9pPr>
   </p:defaultTextStyle>
   <p:extLst>
-    <p:ext uri="{521415D9-36F7-43E2-AB2F-B90AF26B5E84}">
-      <p14:sectionLst xmlns:p14="http://schemas.microsoft.com/office/powerpoint/2010/main">
-        <p14:section name="Reiser Warmth" id="{3F9DFA72-D4BD-624D-9D4A-E3772D6E2EC2}">
-          <p14:sldIdLst>
-            <p14:sldId id="293"/>
-            <p14:sldId id="275"/>
-            <p14:sldId id="276"/>
-            <p14:sldId id="277"/>
-            <p14:sldId id="278"/>
-            <p14:sldId id="279"/>
-            <p14:sldId id="280"/>
-            <p14:sldId id="281"/>
-            <p14:sldId id="282"/>
-            <p14:sldId id="283"/>
-            <p14:sldId id="284"/>
-            <p14:sldId id="285"/>
-            <p14:sldId id="286"/>
-            <p14:sldId id="287"/>
-            <p14:sldId id="288"/>
-            <p14:sldId id="289"/>
-            <p14:sldId id="290"/>
-            <p14:sldId id="291"/>
-            <p14:sldId id="292"/>
-          </p14:sldIdLst>
-        </p14:section>
-        <p14:section name="ANA Blue" id="{11D30A14-23DC-D743-8936-F2F733B6B52B}">
-          <p14:sldIdLst>
-            <p14:sldId id="256"/>
-            <p14:sldId id="257"/>
-            <p14:sldId id="258"/>
-            <p14:sldId id="259"/>
-            <p14:sldId id="260"/>
-            <p14:sldId id="261"/>
-            <p14:sldId id="262"/>
-            <p14:sldId id="263"/>
-            <p14:sldId id="264"/>
-            <p14:sldId id="265"/>
-            <p14:sldId id="266"/>
-            <p14:sldId id="267"/>
-            <p14:sldId id="268"/>
-            <p14:sldId id="269"/>
-            <p14:sldId id="270"/>
-            <p14:sldId id="271"/>
-            <p14:sldId id="272"/>
-            <p14:sldId id="273"/>
-            <p14:sldId id="274"/>
-          </p14:sldIdLst>
-        </p14:section>
-      </p14:sectionLst>
-    </p:ext>
     <p:ext uri="{EFAFB233-063F-42B5-8137-9DF3F51BA10A}">
       <p15:sldGuideLst xmlns:p15="http://schemas.microsoft.com/office/powerpoint/2012/main"/>
     </p:ext>
